--- a/Shell_Scripting_Introduction_and_History.pptx
+++ b/Shell_Scripting_Introduction_and_History.pptx
@@ -6,20 +6,20 @@
   </p:sldMasterIdLst>
   <p:sldIdLst>
     <p:sldId id="256" r:id="rId2"/>
-    <p:sldId id="270" r:id="rId3"/>
-    <p:sldId id="257" r:id="rId4"/>
-    <p:sldId id="258" r:id="rId5"/>
-    <p:sldId id="259" r:id="rId6"/>
-    <p:sldId id="260" r:id="rId7"/>
-    <p:sldId id="261" r:id="rId8"/>
-    <p:sldId id="262" r:id="rId9"/>
-    <p:sldId id="263" r:id="rId10"/>
-    <p:sldId id="264" r:id="rId11"/>
-    <p:sldId id="265" r:id="rId12"/>
-    <p:sldId id="266" r:id="rId13"/>
-    <p:sldId id="267" r:id="rId14"/>
-    <p:sldId id="268" r:id="rId15"/>
-    <p:sldId id="271" r:id="rId16"/>
+    <p:sldId id="257" r:id="rId3"/>
+    <p:sldId id="258" r:id="rId4"/>
+    <p:sldId id="259" r:id="rId5"/>
+    <p:sldId id="260" r:id="rId6"/>
+    <p:sldId id="261" r:id="rId7"/>
+    <p:sldId id="262" r:id="rId8"/>
+    <p:sldId id="263" r:id="rId9"/>
+    <p:sldId id="264" r:id="rId10"/>
+    <p:sldId id="265" r:id="rId11"/>
+    <p:sldId id="266" r:id="rId12"/>
+    <p:sldId id="267" r:id="rId13"/>
+    <p:sldId id="268" r:id="rId14"/>
+    <p:sldId id="271" r:id="rId15"/>
+    <p:sldId id="270" r:id="rId16"/>
     <p:sldId id="269" r:id="rId17"/>
   </p:sldIdLst>
   <p:sldSz cx="9144000" cy="6858000" type="screen4x3"/>
@@ -641,7 +641,7 @@
           <a:p>
             <a:fld id="{5BCAD085-E8A6-8845-BD4E-CB4CCA059FC4}" type="datetimeFigureOut">
               <a:rPr lang="en-US" smtClean="0"/>
-              <a:t>1/30/26</a:t>
+              <a:t>1/31/26</a:t>
             </a:fld>
             <a:endParaRPr lang="en-US"/>
           </a:p>
@@ -825,7 +825,7 @@
           <a:p>
             <a:fld id="{5BCAD085-E8A6-8845-BD4E-CB4CCA059FC4}" type="datetimeFigureOut">
               <a:rPr lang="en-US" smtClean="0"/>
-              <a:t>1/30/26</a:t>
+              <a:t>1/31/26</a:t>
             </a:fld>
             <a:endParaRPr lang="en-US"/>
           </a:p>
@@ -1009,7 +1009,7 @@
           <a:p>
             <a:fld id="{5BCAD085-E8A6-8845-BD4E-CB4CCA059FC4}" type="datetimeFigureOut">
               <a:rPr lang="en-US" smtClean="0"/>
-              <a:t>1/30/26</a:t>
+              <a:t>1/31/26</a:t>
             </a:fld>
             <a:endParaRPr lang="en-US"/>
           </a:p>
@@ -1179,7 +1179,7 @@
           <a:p>
             <a:fld id="{5BCAD085-E8A6-8845-BD4E-CB4CCA059FC4}" type="datetimeFigureOut">
               <a:rPr lang="en-US" smtClean="0"/>
-              <a:t>1/30/26</a:t>
+              <a:t>1/31/26</a:t>
             </a:fld>
             <a:endParaRPr lang="en-US"/>
           </a:p>
@@ -1512,7 +1512,7 @@
           <a:p>
             <a:fld id="{5BCAD085-E8A6-8845-BD4E-CB4CCA059FC4}" type="datetimeFigureOut">
               <a:rPr lang="en-US" smtClean="0"/>
-              <a:t>1/30/26</a:t>
+              <a:t>1/31/26</a:t>
             </a:fld>
             <a:endParaRPr lang="en-US"/>
           </a:p>
@@ -1984,7 +1984,7 @@
           <a:p>
             <a:fld id="{5BCAD085-E8A6-8845-BD4E-CB4CCA059FC4}" type="datetimeFigureOut">
               <a:rPr lang="en-US" smtClean="0"/>
-              <a:t>1/30/26</a:t>
+              <a:t>1/31/26</a:t>
             </a:fld>
             <a:endParaRPr lang="en-US"/>
           </a:p>
@@ -2395,7 +2395,7 @@
           <a:p>
             <a:fld id="{5BCAD085-E8A6-8845-BD4E-CB4CCA059FC4}" type="datetimeFigureOut">
               <a:rPr lang="en-US" smtClean="0"/>
-              <a:t>1/30/26</a:t>
+              <a:t>1/31/26</a:t>
             </a:fld>
             <a:endParaRPr lang="en-US"/>
           </a:p>
@@ -2523,7 +2523,7 @@
           <a:p>
             <a:fld id="{5BCAD085-E8A6-8845-BD4E-CB4CCA059FC4}" type="datetimeFigureOut">
               <a:rPr lang="en-US" smtClean="0"/>
-              <a:t>1/30/26</a:t>
+              <a:t>1/31/26</a:t>
             </a:fld>
             <a:endParaRPr lang="en-US"/>
           </a:p>
@@ -2651,7 +2651,7 @@
           <a:p>
             <a:fld id="{5BCAD085-E8A6-8845-BD4E-CB4CCA059FC4}" type="datetimeFigureOut">
               <a:rPr lang="en-US" smtClean="0"/>
-              <a:t>1/30/26</a:t>
+              <a:t>1/31/26</a:t>
             </a:fld>
             <a:endParaRPr lang="en-US"/>
           </a:p>
@@ -3174,7 +3174,7 @@
           <a:p>
             <a:fld id="{5BCAD085-E8A6-8845-BD4E-CB4CCA059FC4}" type="datetimeFigureOut">
               <a:rPr lang="en-US" smtClean="0"/>
-              <a:t>1/30/26</a:t>
+              <a:t>1/31/26</a:t>
             </a:fld>
             <a:endParaRPr lang="en-US"/>
           </a:p>
@@ -3683,7 +3683,7 @@
           <a:p>
             <a:fld id="{5BCAD085-E8A6-8845-BD4E-CB4CCA059FC4}" type="datetimeFigureOut">
               <a:rPr lang="en-US" smtClean="0"/>
-              <a:t>1/30/26</a:t>
+              <a:t>1/31/26</a:t>
             </a:fld>
             <a:endParaRPr lang="en-US"/>
           </a:p>
@@ -4042,7 +4042,7 @@
           <a:p>
             <a:fld id="{5BCAD085-E8A6-8845-BD4E-CB4CCA059FC4}" type="datetimeFigureOut">
               <a:rPr lang="en-US" smtClean="0"/>
-              <a:t>1/30/26</a:t>
+              <a:t>1/31/26</a:t>
             </a:fld>
             <a:endParaRPr lang="en-US"/>
           </a:p>
@@ -4547,6 +4547,7 @@
           <a:lstStyle/>
           <a:p>
             <a:r>
+              <a:rPr dirty="0"/>
               <a:t>Shell Scripting</a:t>
             </a:r>
           </a:p>
@@ -4580,36 +4581,6 @@
               <a:buNone/>
             </a:pPr>
             <a:endParaRPr lang="en-IN" dirty="0"/>
-          </a:p>
-          <a:p>
-            <a:r>
-              <a:rPr lang="en-IN" sz="3600" dirty="0">
-                <a:hlinkClick r:id="rId2"/>
-              </a:rPr>
-              <a:t>https://github.com/jpaspm</a:t>
-            </a:r>
-            <a:endParaRPr lang="en-IN" sz="3600" dirty="0"/>
-          </a:p>
-          <a:p>
-            <a:r>
-              <a:rPr lang="en-IN" sz="3600" dirty="0">
-                <a:hlinkClick r:id="rId3"/>
-              </a:rPr>
-              <a:t>https://github.com/jpaspm/shell_programming.git</a:t>
-            </a:r>
-            <a:endParaRPr lang="en-IN" sz="3600" dirty="0"/>
-          </a:p>
-          <a:p>
-            <a:r>
-              <a:rPr lang="en-IN" sz="3600" dirty="0">
-                <a:hlinkClick r:id="rId4"/>
-              </a:rPr>
-              <a:t>https://github.com/logicopslab/BashScripting.git</a:t>
-            </a:r>
-            <a:endParaRPr lang="en-IN" sz="3600" dirty="0"/>
-          </a:p>
-          <a:p>
-            <a:endParaRPr sz="3600" dirty="0"/>
           </a:p>
         </p:txBody>
       </p:sp>
@@ -4654,7 +4625,7 @@
           <a:lstStyle/>
           <a:p>
             <a:r>
-              <a:t>Korn Shell (ksh)</a:t>
+              <a:t>Bourne Again Shell (bash)</a:t>
             </a:r>
           </a:p>
         </p:txBody>
@@ -4675,12 +4646,12 @@
           <a:lstStyle/>
           <a:p>
             <a:r>
-              <a:t>Developed by David Korn</a:t>
-            </a:r>
-          </a:p>
-          <a:p>
-            <a:r>
-              <a:t>Advanced scripting features</a:t>
+              <a:t>Developed for GNU Project</a:t>
+            </a:r>
+          </a:p>
+          <a:p>
+            <a:r>
+              <a:t>Default Linux shell</a:t>
             </a:r>
           </a:p>
         </p:txBody>
@@ -4726,7 +4697,7 @@
           <a:lstStyle/>
           <a:p>
             <a:r>
-              <a:t>Bourne Again Shell (bash)</a:t>
+              <a:t>Modern Shells</a:t>
             </a:r>
           </a:p>
         </p:txBody>
@@ -4747,12 +4718,12 @@
           <a:lstStyle/>
           <a:p>
             <a:r>
-              <a:t>Developed for GNU Project</a:t>
-            </a:r>
-          </a:p>
-          <a:p>
-            <a:r>
-              <a:t>Default Linux shell</a:t>
+              <a:t>zsh – plugins &amp; customization</a:t>
+            </a:r>
+          </a:p>
+          <a:p>
+            <a:r>
+              <a:t>fish – user friendly</a:t>
             </a:r>
           </a:p>
         </p:txBody>
@@ -4798,7 +4769,7 @@
           <a:lstStyle/>
           <a:p>
             <a:r>
-              <a:t>Modern Shells</a:t>
+              <a:t>Evolution Timeline</a:t>
             </a:r>
           </a:p>
         </p:txBody>
@@ -4819,12 +4790,7 @@
           <a:lstStyle/>
           <a:p>
             <a:r>
-              <a:t>zsh – plugins &amp; customization</a:t>
-            </a:r>
-          </a:p>
-          <a:p>
-            <a:r>
-              <a:t>fish – user friendly</a:t>
+              <a:t>sh → csh → ksh → bash → zsh</a:t>
             </a:r>
           </a:p>
         </p:txBody>
@@ -4870,7 +4836,7 @@
           <a:lstStyle/>
           <a:p>
             <a:r>
-              <a:t>Evolution Timeline</a:t>
+              <a:t>Shell Scripting Today</a:t>
             </a:r>
           </a:p>
         </p:txBody>
@@ -4891,7 +4857,17 @@
           <a:lstStyle/>
           <a:p>
             <a:r>
-              <a:t>sh → csh → ksh → bash → zsh</a:t>
+              <a:t>DevOps</a:t>
+            </a:r>
+          </a:p>
+          <a:p>
+            <a:r>
+              <a:t>Cloud automation</a:t>
+            </a:r>
+          </a:p>
+          <a:p>
+            <a:r>
+              <a:t>CI/CD pipelines</a:t>
             </a:r>
           </a:p>
         </p:txBody>
@@ -4937,83 +4913,6 @@
           <a:lstStyle/>
           <a:p>
             <a:r>
-              <a:t>Shell Scripting Today</a:t>
-            </a:r>
-          </a:p>
-        </p:txBody>
-      </p:sp>
-      <p:sp>
-        <p:nvSpPr>
-          <p:cNvPr id="3" name="Content Placeholder 2"/>
-          <p:cNvSpPr>
-            <a:spLocks noGrp="1"/>
-          </p:cNvSpPr>
-          <p:nvPr>
-            <p:ph idx="1"/>
-          </p:nvPr>
-        </p:nvSpPr>
-        <p:spPr/>
-        <p:txBody>
-          <a:bodyPr/>
-          <a:lstStyle/>
-          <a:p>
-            <a:r>
-              <a:t>DevOps</a:t>
-            </a:r>
-          </a:p>
-          <a:p>
-            <a:r>
-              <a:t>Cloud automation</a:t>
-            </a:r>
-          </a:p>
-          <a:p>
-            <a:r>
-              <a:t>CI/CD pipelines</a:t>
-            </a:r>
-          </a:p>
-        </p:txBody>
-      </p:sp>
-    </p:spTree>
-  </p:cSld>
-  <p:clrMapOvr>
-    <a:masterClrMapping/>
-  </p:clrMapOvr>
-</p:sld>
-</file>
-
-<file path=ppt/slides/slide15.xml><?xml version="1.0" encoding="utf-8"?>
-<p:sld xmlns:a="http://schemas.openxmlformats.org/drawingml/2006/main" xmlns:r="http://schemas.openxmlformats.org/officeDocument/2006/relationships" xmlns:p="http://schemas.openxmlformats.org/presentationml/2006/main">
-  <p:cSld>
-    <p:spTree>
-      <p:nvGrpSpPr>
-        <p:cNvPr id="1" name=""/>
-        <p:cNvGrpSpPr/>
-        <p:nvPr/>
-      </p:nvGrpSpPr>
-      <p:grpSpPr>
-        <a:xfrm>
-          <a:off x="0" y="0"/>
-          <a:ext cx="0" cy="0"/>
-          <a:chOff x="0" y="0"/>
-          <a:chExt cx="0" cy="0"/>
-        </a:xfrm>
-      </p:grpSpPr>
-      <p:sp>
-        <p:nvSpPr>
-          <p:cNvPr id="2" name="Title 1"/>
-          <p:cNvSpPr>
-            <a:spLocks noGrp="1"/>
-          </p:cNvSpPr>
-          <p:nvPr>
-            <p:ph type="title"/>
-          </p:nvPr>
-        </p:nvSpPr>
-        <p:spPr/>
-        <p:txBody>
-          <a:bodyPr/>
-          <a:lstStyle/>
-          <a:p>
-            <a:r>
               <a:rPr lang="en-US" dirty="0"/>
               <a:t>RESOURCES</a:t>
             </a:r>
@@ -5088,79 +4987,7 @@
 </p:sld>
 </file>
 
-<file path=ppt/slides/slide16.xml><?xml version="1.0" encoding="utf-8"?>
-<p:sld xmlns:a="http://schemas.openxmlformats.org/drawingml/2006/main" xmlns:r="http://schemas.openxmlformats.org/officeDocument/2006/relationships" xmlns:p="http://schemas.openxmlformats.org/presentationml/2006/main">
-  <p:cSld>
-    <p:spTree>
-      <p:nvGrpSpPr>
-        <p:cNvPr id="1" name=""/>
-        <p:cNvGrpSpPr/>
-        <p:nvPr/>
-      </p:nvGrpSpPr>
-      <p:grpSpPr>
-        <a:xfrm>
-          <a:off x="0" y="0"/>
-          <a:ext cx="0" cy="0"/>
-          <a:chOff x="0" y="0"/>
-          <a:chExt cx="0" cy="0"/>
-        </a:xfrm>
-      </p:grpSpPr>
-      <p:sp>
-        <p:nvSpPr>
-          <p:cNvPr id="2" name="Title 1"/>
-          <p:cNvSpPr>
-            <a:spLocks noGrp="1"/>
-          </p:cNvSpPr>
-          <p:nvPr>
-            <p:ph type="title"/>
-          </p:nvPr>
-        </p:nvSpPr>
-        <p:spPr/>
-        <p:txBody>
-          <a:bodyPr/>
-          <a:lstStyle/>
-          <a:p>
-            <a:r>
-              <a:t>Summary</a:t>
-            </a:r>
-          </a:p>
-        </p:txBody>
-      </p:sp>
-      <p:sp>
-        <p:nvSpPr>
-          <p:cNvPr id="3" name="Content Placeholder 2"/>
-          <p:cNvSpPr>
-            <a:spLocks noGrp="1"/>
-          </p:cNvSpPr>
-          <p:nvPr>
-            <p:ph idx="1"/>
-          </p:nvPr>
-        </p:nvSpPr>
-        <p:spPr/>
-        <p:txBody>
-          <a:bodyPr/>
-          <a:lstStyle/>
-          <a:p>
-            <a:r>
-              <a:t>Shell scripting is foundational</a:t>
-            </a:r>
-          </a:p>
-          <a:p>
-            <a:r>
-              <a:t>Still widely used today</a:t>
-            </a:r>
-          </a:p>
-        </p:txBody>
-      </p:sp>
-    </p:spTree>
-  </p:cSld>
-  <p:clrMapOvr>
-    <a:masterClrMapping/>
-  </p:clrMapOvr>
-</p:sld>
-</file>
-
-<file path=ppt/slides/slide2.xml><?xml version="1.0" encoding="utf-8"?>
+<file path=ppt/slides/slide15.xml><?xml version="1.0" encoding="utf-8"?>
 <p:sld xmlns:a="http://schemas.openxmlformats.org/drawingml/2006/main" xmlns:r="http://schemas.openxmlformats.org/officeDocument/2006/relationships" xmlns:p="http://schemas.openxmlformats.org/presentationml/2006/main">
   <p:cSld>
     <p:spTree>
@@ -5278,6 +5105,155 @@
 </p:sld>
 </file>
 
+<file path=ppt/slides/slide16.xml><?xml version="1.0" encoding="utf-8"?>
+<p:sld xmlns:a="http://schemas.openxmlformats.org/drawingml/2006/main" xmlns:r="http://schemas.openxmlformats.org/officeDocument/2006/relationships" xmlns:p="http://schemas.openxmlformats.org/presentationml/2006/main">
+  <p:cSld>
+    <p:spTree>
+      <p:nvGrpSpPr>
+        <p:cNvPr id="1" name=""/>
+        <p:cNvGrpSpPr/>
+        <p:nvPr/>
+      </p:nvGrpSpPr>
+      <p:grpSpPr>
+        <a:xfrm>
+          <a:off x="0" y="0"/>
+          <a:ext cx="0" cy="0"/>
+          <a:chOff x="0" y="0"/>
+          <a:chExt cx="0" cy="0"/>
+        </a:xfrm>
+      </p:grpSpPr>
+      <p:sp>
+        <p:nvSpPr>
+          <p:cNvPr id="2" name="Title 1"/>
+          <p:cNvSpPr>
+            <a:spLocks noGrp="1"/>
+          </p:cNvSpPr>
+          <p:nvPr>
+            <p:ph type="title"/>
+          </p:nvPr>
+        </p:nvSpPr>
+        <p:spPr/>
+        <p:txBody>
+          <a:bodyPr/>
+          <a:lstStyle/>
+          <a:p>
+            <a:r>
+              <a:t>Summary</a:t>
+            </a:r>
+          </a:p>
+        </p:txBody>
+      </p:sp>
+      <p:sp>
+        <p:nvSpPr>
+          <p:cNvPr id="3" name="Content Placeholder 2"/>
+          <p:cNvSpPr>
+            <a:spLocks noGrp="1"/>
+          </p:cNvSpPr>
+          <p:nvPr>
+            <p:ph idx="1"/>
+          </p:nvPr>
+        </p:nvSpPr>
+        <p:spPr/>
+        <p:txBody>
+          <a:bodyPr/>
+          <a:lstStyle/>
+          <a:p>
+            <a:r>
+              <a:t>Shell scripting is foundational</a:t>
+            </a:r>
+          </a:p>
+          <a:p>
+            <a:r>
+              <a:t>Still widely used today</a:t>
+            </a:r>
+          </a:p>
+        </p:txBody>
+      </p:sp>
+    </p:spTree>
+  </p:cSld>
+  <p:clrMapOvr>
+    <a:masterClrMapping/>
+  </p:clrMapOvr>
+</p:sld>
+</file>
+
+<file path=ppt/slides/slide2.xml><?xml version="1.0" encoding="utf-8"?>
+<p:sld xmlns:a="http://schemas.openxmlformats.org/drawingml/2006/main" xmlns:r="http://schemas.openxmlformats.org/officeDocument/2006/relationships" xmlns:p="http://schemas.openxmlformats.org/presentationml/2006/main">
+  <p:cSld>
+    <p:spTree>
+      <p:nvGrpSpPr>
+        <p:cNvPr id="1" name=""/>
+        <p:cNvGrpSpPr/>
+        <p:nvPr/>
+      </p:nvGrpSpPr>
+      <p:grpSpPr>
+        <a:xfrm>
+          <a:off x="0" y="0"/>
+          <a:ext cx="0" cy="0"/>
+          <a:chOff x="0" y="0"/>
+          <a:chExt cx="0" cy="0"/>
+        </a:xfrm>
+      </p:grpSpPr>
+      <p:sp>
+        <p:nvSpPr>
+          <p:cNvPr id="2" name="Title 1"/>
+          <p:cNvSpPr>
+            <a:spLocks noGrp="1"/>
+          </p:cNvSpPr>
+          <p:nvPr>
+            <p:ph type="title"/>
+          </p:nvPr>
+        </p:nvSpPr>
+        <p:spPr/>
+        <p:txBody>
+          <a:bodyPr/>
+          <a:lstStyle/>
+          <a:p>
+            <a:r>
+              <a:t>What is a Shell?</a:t>
+            </a:r>
+          </a:p>
+        </p:txBody>
+      </p:sp>
+      <p:sp>
+        <p:nvSpPr>
+          <p:cNvPr id="3" name="Content Placeholder 2"/>
+          <p:cNvSpPr>
+            <a:spLocks noGrp="1"/>
+          </p:cNvSpPr>
+          <p:nvPr>
+            <p:ph idx="1"/>
+          </p:nvPr>
+        </p:nvSpPr>
+        <p:spPr/>
+        <p:txBody>
+          <a:bodyPr/>
+          <a:lstStyle/>
+          <a:p>
+            <a:r>
+              <a:t>Command-line interpreter</a:t>
+            </a:r>
+          </a:p>
+          <a:p>
+            <a:r>
+              <a:t>Interface between user and kernel</a:t>
+            </a:r>
+          </a:p>
+          <a:p>
+            <a:r>
+              <a:t>Executes commands</a:t>
+            </a:r>
+          </a:p>
+        </p:txBody>
+      </p:sp>
+    </p:spTree>
+  </p:cSld>
+  <p:clrMapOvr>
+    <a:masterClrMapping/>
+  </p:clrMapOvr>
+</p:sld>
+</file>
+
 <file path=ppt/slides/slide3.xml><?xml version="1.0" encoding="utf-8"?>
 <p:sld xmlns:a="http://schemas.openxmlformats.org/drawingml/2006/main" xmlns:r="http://schemas.openxmlformats.org/officeDocument/2006/relationships" xmlns:p="http://schemas.openxmlformats.org/presentationml/2006/main">
   <p:cSld>
@@ -5311,7 +5287,7 @@
           <a:lstStyle/>
           <a:p>
             <a:r>
-              <a:t>What is a Shell?</a:t>
+              <a:t>What is Shell Scripting?</a:t>
             </a:r>
           </a:p>
         </p:txBody>
@@ -5332,17 +5308,17 @@
           <a:lstStyle/>
           <a:p>
             <a:r>
-              <a:t>Command-line interpreter</a:t>
-            </a:r>
-          </a:p>
-          <a:p>
-            <a:r>
-              <a:t>Interface between user and kernel</a:t>
-            </a:r>
-          </a:p>
-          <a:p>
-            <a:r>
-              <a:t>Executes commands</a:t>
+              <a:t>Sequence of shell commands</a:t>
+            </a:r>
+          </a:p>
+          <a:p>
+            <a:r>
+              <a:t>Saved in a script file</a:t>
+            </a:r>
+          </a:p>
+          <a:p>
+            <a:r>
+              <a:t>Used for automation</a:t>
             </a:r>
           </a:p>
         </p:txBody>
@@ -5388,7 +5364,7 @@
           <a:lstStyle/>
           <a:p>
             <a:r>
-              <a:t>What is Shell Scripting?</a:t>
+              <a:t>Why Shell Scripting?</a:t>
             </a:r>
           </a:p>
         </p:txBody>
@@ -5409,17 +5385,17 @@
           <a:lstStyle/>
           <a:p>
             <a:r>
-              <a:t>Sequence of shell commands</a:t>
-            </a:r>
-          </a:p>
-          <a:p>
-            <a:r>
-              <a:t>Saved in a script file</a:t>
-            </a:r>
-          </a:p>
-          <a:p>
-            <a:r>
-              <a:t>Used for automation</a:t>
+              <a:t>System administration</a:t>
+            </a:r>
+          </a:p>
+          <a:p>
+            <a:r>
+              <a:t>Task automation</a:t>
+            </a:r>
+          </a:p>
+          <a:p>
+            <a:r>
+              <a:t>File &amp; process management</a:t>
             </a:r>
           </a:p>
         </p:txBody>
@@ -5465,7 +5441,7 @@
           <a:lstStyle/>
           <a:p>
             <a:r>
-              <a:t>Why Shell Scripting?</a:t>
+              <a:t>Features of Shell Scripting</a:t>
             </a:r>
           </a:p>
         </p:txBody>
@@ -5486,17 +5462,17 @@
           <a:lstStyle/>
           <a:p>
             <a:r>
-              <a:t>System administration</a:t>
-            </a:r>
-          </a:p>
-          <a:p>
-            <a:r>
-              <a:t>Task automation</a:t>
-            </a:r>
-          </a:p>
-          <a:p>
-            <a:r>
-              <a:t>File &amp; process management</a:t>
+              <a:t>Interpreted language</a:t>
+            </a:r>
+          </a:p>
+          <a:p>
+            <a:r>
+              <a:t>Lightweight</a:t>
+            </a:r>
+          </a:p>
+          <a:p>
+            <a:r>
+              <a:t>Powerful text processing</a:t>
             </a:r>
           </a:p>
         </p:txBody>
@@ -5542,7 +5518,7 @@
           <a:lstStyle/>
           <a:p>
             <a:r>
-              <a:t>Features of Shell Scripting</a:t>
+              <a:t>Early UNIX Era</a:t>
             </a:r>
           </a:p>
         </p:txBody>
@@ -5563,17 +5539,12 @@
           <a:lstStyle/>
           <a:p>
             <a:r>
-              <a:t>Interpreted language</a:t>
-            </a:r>
-          </a:p>
-          <a:p>
-            <a:r>
-              <a:t>Lightweight</a:t>
-            </a:r>
-          </a:p>
-          <a:p>
-            <a:r>
-              <a:t>Powerful text processing</a:t>
+              <a:t>Developed at AT&amp;T Bell Labs</a:t>
+            </a:r>
+          </a:p>
+          <a:p>
+            <a:r>
+              <a:t>First shell by Ken Thompson</a:t>
             </a:r>
           </a:p>
         </p:txBody>
@@ -5619,7 +5590,7 @@
           <a:lstStyle/>
           <a:p>
             <a:r>
-              <a:t>Early UNIX Era</a:t>
+              <a:t>Bourne Shell (sh)</a:t>
             </a:r>
           </a:p>
         </p:txBody>
@@ -5640,12 +5611,12 @@
           <a:lstStyle/>
           <a:p>
             <a:r>
-              <a:t>Developed at AT&amp;T Bell Labs</a:t>
-            </a:r>
-          </a:p>
-          <a:p>
-            <a:r>
-              <a:t>First shell by Ken Thompson</a:t>
+              <a:t>Developed by Stephen Bourne</a:t>
+            </a:r>
+          </a:p>
+          <a:p>
+            <a:r>
+              <a:t>Introduced scripting, pipes, redirection</a:t>
             </a:r>
           </a:p>
         </p:txBody>
@@ -5691,7 +5662,7 @@
           <a:lstStyle/>
           <a:p>
             <a:r>
-              <a:t>Bourne Shell (sh)</a:t>
+              <a:t>C Shell (csh)</a:t>
             </a:r>
           </a:p>
         </p:txBody>
@@ -5712,12 +5683,17 @@
           <a:lstStyle/>
           <a:p>
             <a:r>
-              <a:t>Developed by Stephen Bourne</a:t>
-            </a:r>
-          </a:p>
-          <a:p>
-            <a:r>
-              <a:t>Introduced scripting, pipes, redirection</a:t>
+              <a:t>Developed by Bill Joy</a:t>
+            </a:r>
+          </a:p>
+          <a:p>
+            <a:r>
+              <a:t>C-like syntax</a:t>
+            </a:r>
+          </a:p>
+          <a:p>
+            <a:r>
+              <a:t>Job control and history</a:t>
             </a:r>
           </a:p>
         </p:txBody>
@@ -5763,7 +5739,7 @@
           <a:lstStyle/>
           <a:p>
             <a:r>
-              <a:t>C Shell (csh)</a:t>
+              <a:t>Korn Shell (ksh)</a:t>
             </a:r>
           </a:p>
         </p:txBody>
@@ -5784,17 +5760,12 @@
           <a:lstStyle/>
           <a:p>
             <a:r>
-              <a:t>Developed by Bill Joy</a:t>
-            </a:r>
-          </a:p>
-          <a:p>
-            <a:r>
-              <a:t>C-like syntax</a:t>
-            </a:r>
-          </a:p>
-          <a:p>
-            <a:r>
-              <a:t>Job control and history</a:t>
+              <a:t>Developed by David Korn</a:t>
+            </a:r>
+          </a:p>
+          <a:p>
+            <a:r>
+              <a:t>Advanced scripting features</a:t>
             </a:r>
           </a:p>
         </p:txBody>
